--- a/LEC/lec08-dashboarding/lec-dashboarding.pptx
+++ b/LEC/lec08-dashboarding/lec-dashboarding.pptx
@@ -127,7 +127,7 @@
 <file path=ppt/revisionInfo.xml><?xml version="1.0" encoding="utf-8"?>
 <p1510:revInfo xmlns:a="http://schemas.openxmlformats.org/drawingml/2006/main" xmlns:r="http://schemas.openxmlformats.org/officeDocument/2006/relationships" xmlns:p1510="http://schemas.microsoft.com/office/powerpoint/2015/10/main">
   <p1510:revLst>
-    <p1510:client id="{37CAC5AA-0FB9-44F5-BB49-109BCEAB7294}" v="126" dt="2026-04-15T16:35:21.585"/>
+    <p1510:client id="{37CAC5AA-0FB9-44F5-BB49-109BCEAB7294}" v="129" dt="2026-04-15T17:37:55.725"/>
   </p1510:revLst>
 </p1510:revInfo>
 </file>
@@ -137,7 +137,7 @@
   <pc:docChgLst>
     <pc:chgData name="Frommer, Ian Dr. (EDU)" userId="28ca3ff0-544f-450a-928b-99e19cf49b89" providerId="ADAL" clId="{FDDA6EB0-4FD6-4516-ACA5-A4CAC6441DA7}"/>
     <pc:docChg chg="undo custSel addSld delSld modSld sldOrd">
-      <pc:chgData name="Frommer, Ian Dr. (EDU)" userId="28ca3ff0-544f-450a-928b-99e19cf49b89" providerId="ADAL" clId="{FDDA6EB0-4FD6-4516-ACA5-A4CAC6441DA7}" dt="2026-04-15T16:55:10.868" v="2606" actId="14100"/>
+      <pc:chgData name="Frommer, Ian Dr. (EDU)" userId="28ca3ff0-544f-450a-928b-99e19cf49b89" providerId="ADAL" clId="{FDDA6EB0-4FD6-4516-ACA5-A4CAC6441DA7}" dt="2026-04-15T17:38:21.018" v="2651" actId="20577"/>
       <pc:docMkLst>
         <pc:docMk/>
       </pc:docMkLst>
@@ -312,13 +312,13 @@
         </pc:spChg>
       </pc:sldChg>
       <pc:sldChg chg="addSp modSp new mod modNotesTx">
-        <pc:chgData name="Frommer, Ian Dr. (EDU)" userId="28ca3ff0-544f-450a-928b-99e19cf49b89" providerId="ADAL" clId="{FDDA6EB0-4FD6-4516-ACA5-A4CAC6441DA7}" dt="2026-04-15T14:15:22.575" v="1347" actId="27636"/>
+        <pc:chgData name="Frommer, Ian Dr. (EDU)" userId="28ca3ff0-544f-450a-928b-99e19cf49b89" providerId="ADAL" clId="{FDDA6EB0-4FD6-4516-ACA5-A4CAC6441DA7}" dt="2026-04-15T17:38:21.018" v="2651" actId="20577"/>
         <pc:sldMkLst>
           <pc:docMk/>
           <pc:sldMk cId="896320633" sldId="262"/>
         </pc:sldMkLst>
         <pc:spChg chg="mod">
-          <ac:chgData name="Frommer, Ian Dr. (EDU)" userId="28ca3ff0-544f-450a-928b-99e19cf49b89" providerId="ADAL" clId="{FDDA6EB0-4FD6-4516-ACA5-A4CAC6441DA7}" dt="2026-04-15T14:15:22.575" v="1347" actId="27636"/>
+          <ac:chgData name="Frommer, Ian Dr. (EDU)" userId="28ca3ff0-544f-450a-928b-99e19cf49b89" providerId="ADAL" clId="{FDDA6EB0-4FD6-4516-ACA5-A4CAC6441DA7}" dt="2026-04-15T17:38:21.018" v="2651" actId="20577"/>
           <ac:spMkLst>
             <pc:docMk/>
             <pc:sldMk cId="896320633" sldId="262"/>
@@ -766,7 +766,7 @@
           <a:p>
             <a:fld id="{1F2E135B-3498-4585-AEE6-C8E6252DB43A}" type="datetimeFigureOut">
               <a:rPr lang="en-US" smtClean="0"/>
-              <a:t>4/14/2026</a:t>
+              <a:t>4/15/2026</a:t>
             </a:fld>
             <a:endParaRPr lang="en-US"/>
           </a:p>
@@ -1282,7 +1282,7 @@
           <a:p>
             <a:fld id="{9A0DC741-49CA-4CA4-B3D9-63FA1909528B}" type="datetimeFigureOut">
               <a:rPr lang="en-US" smtClean="0"/>
-              <a:t>4/14/2026</a:t>
+              <a:t>4/15/2026</a:t>
             </a:fld>
             <a:endParaRPr lang="en-US"/>
           </a:p>
@@ -1480,7 +1480,7 @@
           <a:p>
             <a:fld id="{9A0DC741-49CA-4CA4-B3D9-63FA1909528B}" type="datetimeFigureOut">
               <a:rPr lang="en-US" smtClean="0"/>
-              <a:t>4/14/2026</a:t>
+              <a:t>4/15/2026</a:t>
             </a:fld>
             <a:endParaRPr lang="en-US"/>
           </a:p>
@@ -1688,7 +1688,7 @@
           <a:p>
             <a:fld id="{9A0DC741-49CA-4CA4-B3D9-63FA1909528B}" type="datetimeFigureOut">
               <a:rPr lang="en-US" smtClean="0"/>
-              <a:t>4/14/2026</a:t>
+              <a:t>4/15/2026</a:t>
             </a:fld>
             <a:endParaRPr lang="en-US"/>
           </a:p>
@@ -1886,7 +1886,7 @@
           <a:p>
             <a:fld id="{9A0DC741-49CA-4CA4-B3D9-63FA1909528B}" type="datetimeFigureOut">
               <a:rPr lang="en-US" smtClean="0"/>
-              <a:t>4/14/2026</a:t>
+              <a:t>4/15/2026</a:t>
             </a:fld>
             <a:endParaRPr lang="en-US"/>
           </a:p>
@@ -2161,7 +2161,7 @@
           <a:p>
             <a:fld id="{9A0DC741-49CA-4CA4-B3D9-63FA1909528B}" type="datetimeFigureOut">
               <a:rPr lang="en-US" smtClean="0"/>
-              <a:t>4/14/2026</a:t>
+              <a:t>4/15/2026</a:t>
             </a:fld>
             <a:endParaRPr lang="en-US"/>
           </a:p>
@@ -2426,7 +2426,7 @@
           <a:p>
             <a:fld id="{9A0DC741-49CA-4CA4-B3D9-63FA1909528B}" type="datetimeFigureOut">
               <a:rPr lang="en-US" smtClean="0"/>
-              <a:t>4/14/2026</a:t>
+              <a:t>4/15/2026</a:t>
             </a:fld>
             <a:endParaRPr lang="en-US"/>
           </a:p>
@@ -2838,7 +2838,7 @@
           <a:p>
             <a:fld id="{9A0DC741-49CA-4CA4-B3D9-63FA1909528B}" type="datetimeFigureOut">
               <a:rPr lang="en-US" smtClean="0"/>
-              <a:t>4/14/2026</a:t>
+              <a:t>4/15/2026</a:t>
             </a:fld>
             <a:endParaRPr lang="en-US"/>
           </a:p>
@@ -2979,7 +2979,7 @@
           <a:p>
             <a:fld id="{9A0DC741-49CA-4CA4-B3D9-63FA1909528B}" type="datetimeFigureOut">
               <a:rPr lang="en-US" smtClean="0"/>
-              <a:t>4/14/2026</a:t>
+              <a:t>4/15/2026</a:t>
             </a:fld>
             <a:endParaRPr lang="en-US"/>
           </a:p>
@@ -3092,7 +3092,7 @@
           <a:p>
             <a:fld id="{9A0DC741-49CA-4CA4-B3D9-63FA1909528B}" type="datetimeFigureOut">
               <a:rPr lang="en-US" smtClean="0"/>
-              <a:t>4/14/2026</a:t>
+              <a:t>4/15/2026</a:t>
             </a:fld>
             <a:endParaRPr lang="en-US"/>
           </a:p>
@@ -3403,7 +3403,7 @@
           <a:p>
             <a:fld id="{9A0DC741-49CA-4CA4-B3D9-63FA1909528B}" type="datetimeFigureOut">
               <a:rPr lang="en-US" smtClean="0"/>
-              <a:t>4/14/2026</a:t>
+              <a:t>4/15/2026</a:t>
             </a:fld>
             <a:endParaRPr lang="en-US"/>
           </a:p>
@@ -3691,7 +3691,7 @@
           <a:p>
             <a:fld id="{9A0DC741-49CA-4CA4-B3D9-63FA1909528B}" type="datetimeFigureOut">
               <a:rPr lang="en-US" smtClean="0"/>
-              <a:t>4/14/2026</a:t>
+              <a:t>4/15/2026</a:t>
             </a:fld>
             <a:endParaRPr lang="en-US"/>
           </a:p>
@@ -3932,7 +3932,7 @@
           <a:p>
             <a:fld id="{9A0DC741-49CA-4CA4-B3D9-63FA1909528B}" type="datetimeFigureOut">
               <a:rPr lang="en-US" smtClean="0"/>
-              <a:t>4/14/2026</a:t>
+              <a:t>4/15/2026</a:t>
             </a:fld>
             <a:endParaRPr lang="en-US"/>
           </a:p>
@@ -5386,7 +5386,7 @@
         </p:spPr>
         <p:txBody>
           <a:bodyPr>
-            <a:normAutofit fontScale="40000" lnSpcReduction="20000"/>
+            <a:normAutofit fontScale="47500" lnSpcReduction="20000"/>
           </a:bodyPr>
           <a:lstStyle/>
           <a:p>
@@ -5459,36 +5459,17 @@
               <a:rPr lang="en-US">
                 <a:hlinkClick r:id="rId8"/>
               </a:rPr>
-              <a:t>Binary_Star_Sim</a:t>
-            </a:r>
-            <a:endParaRPr lang="en-US"/>
+              <a:t>https://juancab.github.io/AstroInteractives/</a:t>
+            </a:r>
+            <a:r>
+              <a:rPr lang="en-US"/>
+              <a:t> (click the Launch Binder button)</a:t>
+            </a:r>
           </a:p>
           <a:p>
             <a:r>
               <a:rPr lang="en-US">
                 <a:hlinkClick r:id="rId9"/>
-              </a:rPr>
-              <a:t>index</a:t>
-            </a:r>
-            <a:r>
-              <a:rPr lang="en-US"/>
-              <a:t> Astron ones</a:t>
-            </a:r>
-          </a:p>
-          <a:p>
-            <a:pPr lvl="1"/>
-            <a:r>
-              <a:rPr lang="en-US">
-                <a:hlinkClick r:id="rId8"/>
-              </a:rPr>
-              <a:t>Binary_Star_Sim</a:t>
-            </a:r>
-            <a:endParaRPr lang="en-US"/>
-          </a:p>
-          <a:p>
-            <a:r>
-              <a:rPr lang="en-US">
-                <a:hlinkClick r:id="rId10"/>
               </a:rPr>
               <a:t>https://github.com/JuanCab/COVID_DataViz</a:t>
             </a:r>
@@ -5520,7 +5501,7 @@
           <p:nvPr/>
         </p:nvPicPr>
         <p:blipFill>
-          <a:blip r:embed="rId11"/>
+          <a:blip r:embed="rId10"/>
           <a:stretch>
             <a:fillRect/>
           </a:stretch>
@@ -5550,7 +5531,7 @@
           <p:nvPr/>
         </p:nvPicPr>
         <p:blipFill>
-          <a:blip r:embed="rId12">
+          <a:blip r:embed="rId11">
             <a:extLst>
               <a:ext uri="{28A0092B-C50C-407E-A947-70E740481C1C}">
                 <a14:useLocalDpi xmlns:a14="http://schemas.microsoft.com/office/drawing/2010/main" val="0"/>
@@ -5597,7 +5578,7 @@
           <p:nvPr/>
         </p:nvPicPr>
         <p:blipFill>
-          <a:blip r:embed="rId13">
+          <a:blip r:embed="rId12">
             <a:extLst>
               <a:ext uri="{28A0092B-C50C-407E-A947-70E740481C1C}">
                 <a14:useLocalDpi xmlns:a14="http://schemas.microsoft.com/office/drawing/2010/main" val="0"/>
